--- a/templates/中文履歷_楊上瑋_資料科學家.pptx
+++ b/templates/中文履歷_楊上瑋_資料科學家.pptx
@@ -14569,7 +14569,7 @@
                 <a:cs typeface="Lato"/>
                 <a:sym typeface="Lato"/>
               </a:rPr>
-              <a:t>8年跨媒體、新聞與藝術產業數據經驗，近年聚焦機器學習與LLM應用：DistilBERT+Gemini新聞分類（處理資料洩漏與標籤清洗，macro-F1 0.81）、內部RAG助理與8項決定性檢核評測層、推薦排序分析使觀看成長5%。經濟學碩士，中英日三語。</a:t>
+              <a:t>8年跨媒體、新聞與藝術產業數據經驗，近年聚焦機器學習與LLM應用：DistilBERT+Gemini新聞分類（處理資料洩漏與標籤清洗，macro-F1 0.81）、內部RAG助理與8項決定性檢核評測層、推薦排序分析使觀看成長5%。經濟學碩士，已通過iPAS AI應用規劃師中級，中英日三語。</a:t>
             </a:r>
             <a:r>
               <a:rPr kumimoji="0" lang="zh-TW" altLang="en-US" sz="1000" b="0" i="0" u="none" strike="noStrike" kern="0" cap="none" spc="0" normalizeH="0" baseline="0" noProof="0" dirty="0">
@@ -15425,7 +15425,7 @@
                 <a:cs typeface="Lato"/>
                 <a:sym typeface="Lato"/>
               </a:rPr>
-              <a:t>DistilBERT+Gemini信心度級聯，處理資料洩漏與標籤清洗，accuracy與macro-F1皆0.81。</a:t>
+              <a:t>DistilBERT+Gemini信心度級聯，處理資料洩漏與標籤清洗，準確率與macro-F1皆0.81。</a:t>
             </a:r>
             <a:r>
               <a:rPr lang="en-US" altLang="zh-TW" sz="1000" i="0" u="none" strike="noStrike" cap="none" dirty="0">
@@ -15516,7 +15516,7 @@
                 <a:cs typeface="Lato"/>
                 <a:sym typeface="Lato"/>
               </a:rPr>
-              <a:t>BigQuery→Vertex AI Search→Gemini，8項決定性檢核驗證引用與數字，檢索效率提升30%。</a:t>
+              <a:t>BigQuery→Vertex AI Search→Gemini，部署於Cloud Run，8項決定性檢核驗證引用與數字，檢索效率提升30%。</a:t>
             </a:r>
             <a:r>
               <a:rPr lang="en-US" altLang="zh-TW" sz="1000" i="0" u="none" strike="noStrike" cap="none" dirty="0">
@@ -16877,7 +16877,7 @@
                 <a:latin typeface="微軟正黑體" panose="020B0604030504040204" pitchFamily="34" charset="-120"/>
                 <a:ea typeface="微軟正黑體" panose="020B0604030504040204" pitchFamily="34" charset="-120"/>
               </a:rPr>
-              <a:t>中央研究院人文社會研究中心</a:t>
+              <a:t>中研院人文社會科學研究中心</a:t>
             </a:r>
             <a:endParaRPr dirty="0">
               <a:solidFill>
